--- a/week2 - Routes and Layout/M8Prog laravel 02 - Nav en routes.pptx
+++ b/week2 - Routes and Layout/M8Prog laravel 02 - Nav en routes.pptx
@@ -438,7 +438,7 @@
           <a:p>
             <a:fld id="{AD36792F-A28E-4983-A7F5-F40ED51D6004}" type="datetimeFigureOut">
               <a:rPr lang="nl-NL" smtClean="0"/>
-              <a:t>21-4-2026</a:t>
+              <a:t>23-4-2026</a:t>
             </a:fld>
             <a:endParaRPr lang="nl-NL"/>
           </a:p>
@@ -638,7 +638,7 @@
           <a:p>
             <a:fld id="{AD36792F-A28E-4983-A7F5-F40ED51D6004}" type="datetimeFigureOut">
               <a:rPr lang="nl-NL" smtClean="0"/>
-              <a:t>21-4-2026</a:t>
+              <a:t>23-4-2026</a:t>
             </a:fld>
             <a:endParaRPr lang="nl-NL"/>
           </a:p>
@@ -848,7 +848,7 @@
           <a:p>
             <a:fld id="{AD36792F-A28E-4983-A7F5-F40ED51D6004}" type="datetimeFigureOut">
               <a:rPr lang="nl-NL" smtClean="0"/>
-              <a:t>21-4-2026</a:t>
+              <a:t>23-4-2026</a:t>
             </a:fld>
             <a:endParaRPr lang="nl-NL"/>
           </a:p>
@@ -1048,7 +1048,7 @@
           <a:p>
             <a:fld id="{AD36792F-A28E-4983-A7F5-F40ED51D6004}" type="datetimeFigureOut">
               <a:rPr lang="nl-NL" smtClean="0"/>
-              <a:t>21-4-2026</a:t>
+              <a:t>23-4-2026</a:t>
             </a:fld>
             <a:endParaRPr lang="nl-NL"/>
           </a:p>
@@ -1324,7 +1324,7 @@
           <a:p>
             <a:fld id="{AD36792F-A28E-4983-A7F5-F40ED51D6004}" type="datetimeFigureOut">
               <a:rPr lang="nl-NL" smtClean="0"/>
-              <a:t>21-4-2026</a:t>
+              <a:t>23-4-2026</a:t>
             </a:fld>
             <a:endParaRPr lang="nl-NL"/>
           </a:p>
@@ -1592,7 +1592,7 @@
           <a:p>
             <a:fld id="{AD36792F-A28E-4983-A7F5-F40ED51D6004}" type="datetimeFigureOut">
               <a:rPr lang="nl-NL" smtClean="0"/>
-              <a:t>21-4-2026</a:t>
+              <a:t>23-4-2026</a:t>
             </a:fld>
             <a:endParaRPr lang="nl-NL"/>
           </a:p>
@@ -2007,7 +2007,7 @@
           <a:p>
             <a:fld id="{AD36792F-A28E-4983-A7F5-F40ED51D6004}" type="datetimeFigureOut">
               <a:rPr lang="nl-NL" smtClean="0"/>
-              <a:t>21-4-2026</a:t>
+              <a:t>23-4-2026</a:t>
             </a:fld>
             <a:endParaRPr lang="nl-NL"/>
           </a:p>
@@ -2149,7 +2149,7 @@
           <a:p>
             <a:fld id="{AD36792F-A28E-4983-A7F5-F40ED51D6004}" type="datetimeFigureOut">
               <a:rPr lang="nl-NL" smtClean="0"/>
-              <a:t>21-4-2026</a:t>
+              <a:t>23-4-2026</a:t>
             </a:fld>
             <a:endParaRPr lang="nl-NL"/>
           </a:p>
@@ -2262,7 +2262,7 @@
           <a:p>
             <a:fld id="{AD36792F-A28E-4983-A7F5-F40ED51D6004}" type="datetimeFigureOut">
               <a:rPr lang="nl-NL" smtClean="0"/>
-              <a:t>21-4-2026</a:t>
+              <a:t>23-4-2026</a:t>
             </a:fld>
             <a:endParaRPr lang="nl-NL"/>
           </a:p>
@@ -2575,7 +2575,7 @@
           <a:p>
             <a:fld id="{AD36792F-A28E-4983-A7F5-F40ED51D6004}" type="datetimeFigureOut">
               <a:rPr lang="nl-NL" smtClean="0"/>
-              <a:t>21-4-2026</a:t>
+              <a:t>23-4-2026</a:t>
             </a:fld>
             <a:endParaRPr lang="nl-NL"/>
           </a:p>
@@ -2864,7 +2864,7 @@
           <a:p>
             <a:fld id="{AD36792F-A28E-4983-A7F5-F40ED51D6004}" type="datetimeFigureOut">
               <a:rPr lang="nl-NL" smtClean="0"/>
-              <a:t>21-4-2026</a:t>
+              <a:t>23-4-2026</a:t>
             </a:fld>
             <a:endParaRPr lang="nl-NL"/>
           </a:p>
@@ -3114,7 +3114,7 @@
           <a:p>
             <a:fld id="{AD36792F-A28E-4983-A7F5-F40ED51D6004}" type="datetimeFigureOut">
               <a:rPr lang="nl-NL" smtClean="0"/>
-              <a:t>21-4-2026</a:t>
+              <a:t>23-4-2026</a:t>
             </a:fld>
             <a:endParaRPr lang="nl-NL"/>
           </a:p>
@@ -4997,7 +4997,7 @@
           <a:p>
             <a:r>
               <a:rPr lang="nl-NL" dirty="0"/>
-              <a:t>Week 2</a:t>
+              <a:t>Deze les</a:t>
             </a:r>
           </a:p>
         </p:txBody>
@@ -5030,20 +5030,12 @@
           <a:p>
             <a:r>
               <a:rPr lang="nl-NL" dirty="0"/>
-              <a:t>In de les en huiswerk</a:t>
-            </a:r>
-          </a:p>
-          <a:p>
-            <a:pPr lvl="1"/>
-            <a:r>
-              <a:rPr lang="nl-NL" dirty="0"/>
-              <a:t>(af voor de les volgende week)</a:t>
-            </a:r>
-            <a:endParaRPr lang="nl-NL" dirty="0">
-              <a:hlinkClick r:id="rId2"/>
-            </a:endParaRPr>
-          </a:p>
-          <a:p>
+              <a:t>In de les </a:t>
+            </a:r>
+            <a:r>
+              <a:rPr lang="nl-NL"/>
+              <a:t>en huiswerk</a:t>
+            </a:r>
             <a:endParaRPr lang="nl-NL" dirty="0">
               <a:hlinkClick r:id="rId2"/>
             </a:endParaRPr>
@@ -5064,10 +5056,10 @@
       </p:sp>
       <p:pic>
         <p:nvPicPr>
-          <p:cNvPr id="8" name="Picture 7">
-            <a:extLst>
-              <a:ext uri="{FF2B5EF4-FFF2-40B4-BE49-F238E27FC236}">
-                <a16:creationId xmlns:a16="http://schemas.microsoft.com/office/drawing/2014/main" id="{2F1D0342-0340-5B9A-A896-301CDBAD8385}"/>
+          <p:cNvPr id="5" name="Picture 4">
+            <a:extLst>
+              <a:ext uri="{FF2B5EF4-FFF2-40B4-BE49-F238E27FC236}">
+                <a16:creationId xmlns:a16="http://schemas.microsoft.com/office/drawing/2014/main" id="{23893073-A2C0-DBE5-C2CA-4C4ED9C18395}"/>
               </a:ext>
             </a:extLst>
           </p:cNvPr>
@@ -5084,8 +5076,8 @@
         </p:blipFill>
         <p:spPr>
           <a:xfrm>
-            <a:off x="7036243" y="1690688"/>
-            <a:ext cx="4505325" cy="4333875"/>
+            <a:off x="5721948" y="4652830"/>
+            <a:ext cx="6221607" cy="1688033"/>
           </a:xfrm>
           <a:prstGeom prst="rect">
             <a:avLst/>

--- a/week2 - Routes and Layout/M8Prog laravel 02 - Nav en routes.pptx
+++ b/week2 - Routes and Layout/M8Prog laravel 02 - Nav en routes.pptx
@@ -128,114 +128,29 @@
 </p:presentation>
 </file>
 
-<file path=ppt/revisionInfo.xml><?xml version="1.0" encoding="utf-8"?>
-<p1510:revInfo xmlns:a="http://schemas.openxmlformats.org/drawingml/2006/main" xmlns:r="http://schemas.openxmlformats.org/officeDocument/2006/relationships" xmlns:p1510="http://schemas.microsoft.com/office/powerpoint/2015/10/main">
-  <p1510:revLst>
-    <p1510:client id="{B0073C68-941D-4DCA-82B9-23A95BA68F2A}" v="7" dt="2026-04-21T06:11:58.663"/>
-  </p1510:revLst>
-</p1510:revInfo>
-</file>
-
 <file path=ppt/changesInfos/changesInfo1.xml><?xml version="1.0" encoding="utf-8"?>
 <pc:chgInfo xmlns:a="http://schemas.openxmlformats.org/drawingml/2006/main" xmlns:r="http://schemas.openxmlformats.org/officeDocument/2006/relationships" xmlns:ac="http://schemas.microsoft.com/office/drawing/2013/main/command" xmlns:pc="http://schemas.microsoft.com/office/powerpoint/2013/main/command">
   <pc:docChgLst>
     <pc:chgData name="Dragan Javorac" userId="913c2858-fb97-4c6e-a42c-b1f1a16b225e" providerId="ADAL" clId="{BC00D9DF-F858-4149-8B7B-F211D448CEDA}"/>
     <pc:docChg chg="undo custSel addSld delSld modSld sldOrd">
-      <pc:chgData name="Dragan Javorac" userId="913c2858-fb97-4c6e-a42c-b1f1a16b225e" providerId="ADAL" clId="{BC00D9DF-F858-4149-8B7B-F211D448CEDA}" dt="2026-04-21T06:12:24.410" v="2659" actId="20577"/>
+      <pc:chgData name="Dragan Javorac" userId="913c2858-fb97-4c6e-a42c-b1f1a16b225e" providerId="ADAL" clId="{BC00D9DF-F858-4149-8B7B-F211D448CEDA}" dt="2026-05-21T07:05:52.127" v="2660" actId="20577"/>
       <pc:docMkLst>
         <pc:docMk/>
       </pc:docMkLst>
-      <pc:sldChg chg="modSp del mod">
-        <pc:chgData name="Dragan Javorac" userId="913c2858-fb97-4c6e-a42c-b1f1a16b225e" providerId="ADAL" clId="{BC00D9DF-F858-4149-8B7B-F211D448CEDA}" dt="2026-04-20T14:20:58.366" v="2373" actId="47"/>
+      <pc:sldChg chg="modSp mod">
+        <pc:chgData name="Dragan Javorac" userId="913c2858-fb97-4c6e-a42c-b1f1a16b225e" providerId="ADAL" clId="{BC00D9DF-F858-4149-8B7B-F211D448CEDA}" dt="2026-05-21T07:05:52.127" v="2660" actId="20577"/>
         <pc:sldMkLst>
           <pc:docMk/>
-          <pc:sldMk cId="1912488285" sldId="261"/>
-        </pc:sldMkLst>
-      </pc:sldChg>
-      <pc:sldChg chg="addSp modSp mod">
-        <pc:chgData name="Dragan Javorac" userId="913c2858-fb97-4c6e-a42c-b1f1a16b225e" providerId="ADAL" clId="{BC00D9DF-F858-4149-8B7B-F211D448CEDA}" dt="2026-04-20T14:24:24.610" v="2592" actId="20577"/>
-        <pc:sldMkLst>
-          <pc:docMk/>
-          <pc:sldMk cId="101427003" sldId="283"/>
+          <pc:sldMk cId="1537322978" sldId="282"/>
         </pc:sldMkLst>
         <pc:spChg chg="mod">
-          <ac:chgData name="Dragan Javorac" userId="913c2858-fb97-4c6e-a42c-b1f1a16b225e" providerId="ADAL" clId="{BC00D9DF-F858-4149-8B7B-F211D448CEDA}" dt="2026-04-20T14:24:24.610" v="2592" actId="20577"/>
+          <ac:chgData name="Dragan Javorac" userId="913c2858-fb97-4c6e-a42c-b1f1a16b225e" providerId="ADAL" clId="{BC00D9DF-F858-4149-8B7B-F211D448CEDA}" dt="2026-05-21T07:05:52.127" v="2660" actId="20577"/>
           <ac:spMkLst>
             <pc:docMk/>
-            <pc:sldMk cId="101427003" sldId="283"/>
-            <ac:spMk id="3" creationId="{D38CEE23-534B-9DB1-2E74-9F63ED531722}"/>
+            <pc:sldMk cId="1537322978" sldId="282"/>
+            <ac:spMk id="3" creationId="{4CB1FDF8-B843-3C34-28D5-010874EB152B}"/>
           </ac:spMkLst>
         </pc:spChg>
-        <pc:spChg chg="add mod">
-          <ac:chgData name="Dragan Javorac" userId="913c2858-fb97-4c6e-a42c-b1f1a16b225e" providerId="ADAL" clId="{BC00D9DF-F858-4149-8B7B-F211D448CEDA}" dt="2026-04-20T14:23:53.188" v="2466" actId="20577"/>
-          <ac:spMkLst>
-            <pc:docMk/>
-            <pc:sldMk cId="101427003" sldId="283"/>
-            <ac:spMk id="4" creationId="{A84AA6B0-EC8D-7A88-1A37-FEB5F320749B}"/>
-          </ac:spMkLst>
-        </pc:spChg>
-      </pc:sldChg>
-      <pc:sldChg chg="modSp add del">
-        <pc:chgData name="Dragan Javorac" userId="913c2858-fb97-4c6e-a42c-b1f1a16b225e" providerId="ADAL" clId="{BC00D9DF-F858-4149-8B7B-F211D448CEDA}" dt="2026-04-20T14:22:40.484" v="2376" actId="47"/>
-        <pc:sldMkLst>
-          <pc:docMk/>
-          <pc:sldMk cId="1039330640" sldId="287"/>
-        </pc:sldMkLst>
-        <pc:spChg chg="mod">
-          <ac:chgData name="Dragan Javorac" userId="913c2858-fb97-4c6e-a42c-b1f1a16b225e" providerId="ADAL" clId="{BC00D9DF-F858-4149-8B7B-F211D448CEDA}" dt="2026-04-20T14:21:09.319" v="2374"/>
-          <ac:spMkLst>
-            <pc:docMk/>
-            <pc:sldMk cId="1039330640" sldId="287"/>
-            <ac:spMk id="3" creationId="{6D2639E8-D6B9-2C26-7E9C-B98B2FFAD52C}"/>
-          </ac:spMkLst>
-        </pc:spChg>
-      </pc:sldChg>
-      <pc:sldChg chg="addSp delSp modSp add mod">
-        <pc:chgData name="Dragan Javorac" userId="913c2858-fb97-4c6e-a42c-b1f1a16b225e" providerId="ADAL" clId="{BC00D9DF-F858-4149-8B7B-F211D448CEDA}" dt="2026-04-20T14:29:35.315" v="2598" actId="1076"/>
-        <pc:sldMkLst>
-          <pc:docMk/>
-          <pc:sldMk cId="1569527089" sldId="288"/>
-        </pc:sldMkLst>
-        <pc:spChg chg="mod">
-          <ac:chgData name="Dragan Javorac" userId="913c2858-fb97-4c6e-a42c-b1f1a16b225e" providerId="ADAL" clId="{BC00D9DF-F858-4149-8B7B-F211D448CEDA}" dt="2026-04-20T14:22:49.239" v="2378" actId="20577"/>
-          <ac:spMkLst>
-            <pc:docMk/>
-            <pc:sldMk cId="1569527089" sldId="288"/>
-            <ac:spMk id="2" creationId="{FAF2A692-78E3-882F-D8B1-33931901F659}"/>
-          </ac:spMkLst>
-        </pc:spChg>
-        <pc:spChg chg="mod">
-          <ac:chgData name="Dragan Javorac" userId="913c2858-fb97-4c6e-a42c-b1f1a16b225e" providerId="ADAL" clId="{BC00D9DF-F858-4149-8B7B-F211D448CEDA}" dt="2026-04-20T14:22:50.374" v="2379" actId="20577"/>
-          <ac:spMkLst>
-            <pc:docMk/>
-            <pc:sldMk cId="1569527089" sldId="288"/>
-            <ac:spMk id="3" creationId="{6D2639E8-D6B9-2C26-7E9C-B98B2FFAD52C}"/>
-          </ac:spMkLst>
-        </pc:spChg>
-        <pc:picChg chg="add del">
-          <ac:chgData name="Dragan Javorac" userId="913c2858-fb97-4c6e-a42c-b1f1a16b225e" providerId="ADAL" clId="{BC00D9DF-F858-4149-8B7B-F211D448CEDA}" dt="2026-04-20T14:29:34.655" v="2597" actId="478"/>
-          <ac:picMkLst>
-            <pc:docMk/>
-            <pc:sldMk cId="1569527089" sldId="288"/>
-            <ac:picMk id="5" creationId="{51DBE2E0-B9CF-D01D-E62D-534D13832374}"/>
-          </ac:picMkLst>
-        </pc:picChg>
-        <pc:picChg chg="del">
-          <ac:chgData name="Dragan Javorac" userId="913c2858-fb97-4c6e-a42c-b1f1a16b225e" providerId="ADAL" clId="{BC00D9DF-F858-4149-8B7B-F211D448CEDA}" dt="2026-04-20T14:29:21.256" v="2593" actId="478"/>
-          <ac:picMkLst>
-            <pc:docMk/>
-            <pc:sldMk cId="1569527089" sldId="288"/>
-            <ac:picMk id="7" creationId="{4D8ECB68-BDA5-DC99-0458-1255A5FC22FA}"/>
-          </ac:picMkLst>
-        </pc:picChg>
-        <pc:picChg chg="add mod">
-          <ac:chgData name="Dragan Javorac" userId="913c2858-fb97-4c6e-a42c-b1f1a16b225e" providerId="ADAL" clId="{BC00D9DF-F858-4149-8B7B-F211D448CEDA}" dt="2026-04-20T14:29:35.315" v="2598" actId="1076"/>
-          <ac:picMkLst>
-            <pc:docMk/>
-            <pc:sldMk cId="1569527089" sldId="288"/>
-            <ac:picMk id="8" creationId="{2F1D0342-0340-5B9A-A896-301CDBAD8385}"/>
-          </ac:picMkLst>
-        </pc:picChg>
       </pc:sldChg>
       <pc:sldChg chg="addSp delSp modSp new mod">
         <pc:chgData name="Dragan Javorac" userId="913c2858-fb97-4c6e-a42c-b1f1a16b225e" providerId="ADAL" clId="{BC00D9DF-F858-4149-8B7B-F211D448CEDA}" dt="2026-04-21T06:12:24.410" v="2659" actId="20577"/>
@@ -249,14 +164,6 @@
             <pc:docMk/>
             <pc:sldMk cId="1933563397" sldId="289"/>
             <ac:spMk id="2" creationId="{AF22CDA0-07E0-0C7A-C3C8-9B25355FD55D}"/>
-          </ac:spMkLst>
-        </pc:spChg>
-        <pc:spChg chg="del">
-          <ac:chgData name="Dragan Javorac" userId="913c2858-fb97-4c6e-a42c-b1f1a16b225e" providerId="ADAL" clId="{BC00D9DF-F858-4149-8B7B-F211D448CEDA}" dt="2026-04-21T06:11:58.663" v="2631"/>
-          <ac:spMkLst>
-            <pc:docMk/>
-            <pc:sldMk cId="1933563397" sldId="289"/>
-            <ac:spMk id="3" creationId="{83163373-6B48-F0BC-DFE2-86A5236ADF32}"/>
           </ac:spMkLst>
         </pc:spChg>
         <pc:spChg chg="add mod">
@@ -438,7 +345,7 @@
           <a:p>
             <a:fld id="{AD36792F-A28E-4983-A7F5-F40ED51D6004}" type="datetimeFigureOut">
               <a:rPr lang="nl-NL" smtClean="0"/>
-              <a:t>23-4-2026</a:t>
+              <a:t>21-5-2026</a:t>
             </a:fld>
             <a:endParaRPr lang="nl-NL"/>
           </a:p>
@@ -638,7 +545,7 @@
           <a:p>
             <a:fld id="{AD36792F-A28E-4983-A7F5-F40ED51D6004}" type="datetimeFigureOut">
               <a:rPr lang="nl-NL" smtClean="0"/>
-              <a:t>23-4-2026</a:t>
+              <a:t>21-5-2026</a:t>
             </a:fld>
             <a:endParaRPr lang="nl-NL"/>
           </a:p>
@@ -848,7 +755,7 @@
           <a:p>
             <a:fld id="{AD36792F-A28E-4983-A7F5-F40ED51D6004}" type="datetimeFigureOut">
               <a:rPr lang="nl-NL" smtClean="0"/>
-              <a:t>23-4-2026</a:t>
+              <a:t>21-5-2026</a:t>
             </a:fld>
             <a:endParaRPr lang="nl-NL"/>
           </a:p>
@@ -1048,7 +955,7 @@
           <a:p>
             <a:fld id="{AD36792F-A28E-4983-A7F5-F40ED51D6004}" type="datetimeFigureOut">
               <a:rPr lang="nl-NL" smtClean="0"/>
-              <a:t>23-4-2026</a:t>
+              <a:t>21-5-2026</a:t>
             </a:fld>
             <a:endParaRPr lang="nl-NL"/>
           </a:p>
@@ -1324,7 +1231,7 @@
           <a:p>
             <a:fld id="{AD36792F-A28E-4983-A7F5-F40ED51D6004}" type="datetimeFigureOut">
               <a:rPr lang="nl-NL" smtClean="0"/>
-              <a:t>23-4-2026</a:t>
+              <a:t>21-5-2026</a:t>
             </a:fld>
             <a:endParaRPr lang="nl-NL"/>
           </a:p>
@@ -1592,7 +1499,7 @@
           <a:p>
             <a:fld id="{AD36792F-A28E-4983-A7F5-F40ED51D6004}" type="datetimeFigureOut">
               <a:rPr lang="nl-NL" smtClean="0"/>
-              <a:t>23-4-2026</a:t>
+              <a:t>21-5-2026</a:t>
             </a:fld>
             <a:endParaRPr lang="nl-NL"/>
           </a:p>
@@ -2007,7 +1914,7 @@
           <a:p>
             <a:fld id="{AD36792F-A28E-4983-A7F5-F40ED51D6004}" type="datetimeFigureOut">
               <a:rPr lang="nl-NL" smtClean="0"/>
-              <a:t>23-4-2026</a:t>
+              <a:t>21-5-2026</a:t>
             </a:fld>
             <a:endParaRPr lang="nl-NL"/>
           </a:p>
@@ -2149,7 +2056,7 @@
           <a:p>
             <a:fld id="{AD36792F-A28E-4983-A7F5-F40ED51D6004}" type="datetimeFigureOut">
               <a:rPr lang="nl-NL" smtClean="0"/>
-              <a:t>23-4-2026</a:t>
+              <a:t>21-5-2026</a:t>
             </a:fld>
             <a:endParaRPr lang="nl-NL"/>
           </a:p>
@@ -2262,7 +2169,7 @@
           <a:p>
             <a:fld id="{AD36792F-A28E-4983-A7F5-F40ED51D6004}" type="datetimeFigureOut">
               <a:rPr lang="nl-NL" smtClean="0"/>
-              <a:t>23-4-2026</a:t>
+              <a:t>21-5-2026</a:t>
             </a:fld>
             <a:endParaRPr lang="nl-NL"/>
           </a:p>
@@ -2575,7 +2482,7 @@
           <a:p>
             <a:fld id="{AD36792F-A28E-4983-A7F5-F40ED51D6004}" type="datetimeFigureOut">
               <a:rPr lang="nl-NL" smtClean="0"/>
-              <a:t>23-4-2026</a:t>
+              <a:t>21-5-2026</a:t>
             </a:fld>
             <a:endParaRPr lang="nl-NL"/>
           </a:p>
@@ -2864,7 +2771,7 @@
           <a:p>
             <a:fld id="{AD36792F-A28E-4983-A7F5-F40ED51D6004}" type="datetimeFigureOut">
               <a:rPr lang="nl-NL" smtClean="0"/>
-              <a:t>23-4-2026</a:t>
+              <a:t>21-5-2026</a:t>
             </a:fld>
             <a:endParaRPr lang="nl-NL"/>
           </a:p>
@@ -3114,7 +3021,7 @@
           <a:p>
             <a:fld id="{AD36792F-A28E-4983-A7F5-F40ED51D6004}" type="datetimeFigureOut">
               <a:rPr lang="nl-NL" smtClean="0"/>
-              <a:t>23-4-2026</a:t>
+              <a:t>21-5-2026</a:t>
             </a:fld>
             <a:endParaRPr lang="nl-NL"/>
           </a:p>
@@ -3885,17 +3792,10 @@
           </a:p>
           <a:p>
             <a:r>
-              <a:rPr lang="nl-NL" dirty="0"/>
-              <a:t>Staan </a:t>
-            </a:r>
-            <a:r>
-              <a:rPr lang="nl-NL" dirty="0" err="1"/>
-              <a:t>onde</a:t>
-            </a:r>
-            <a:r>
-              <a:rPr lang="nl-NL" dirty="0"/>
-              <a:t>:</a:t>
-            </a:r>
+              <a:rPr lang="nl-NL"/>
+              <a:t>Staan onder:</a:t>
+            </a:r>
+            <a:endParaRPr lang="nl-NL" dirty="0"/>
           </a:p>
           <a:p>
             <a:pPr lvl="1"/>
